--- a/canvas_material/lectures/powerpoint/Session04-Discovery.pptx
+++ b/canvas_material/lectures/powerpoint/Session04-Discovery.pptx
@@ -956,7 +956,7 @@
           <a:p>
             <a:r>
               <a:rPr lang="en-US" dirty="0"/>
-              <a:t>Hand out Discovery-Notes.md. The non-negotiable: everyone must talk to at least one real person who genuinely has the problem — not a hallway 'sure, I'd use that.' They find their own people; we have no seeded users this iteration. The persona is a required supplement, kept modest. Reassure them that discovering a problem ISN'T real is a great result, not a failure — honest discovery is the grade, not confirmation of their idea. Remind them of consent/ethics and that this feeds directly into the Product Definition Brief next week.</a:t>
+              <a:t>Hand out the Discovery Notes sheet; it is also on Canvas under Course Resources. The non-negotiable: everyone must talk to at least one real person who genuinely has the problem — not a hallway 'sure, I'd use that.' They find their own people; we have no seeded users this iteration. The persona is a required supplement, kept modest. Reassure them that discovering a problem ISN'T real is a great result, not a failure — honest discovery is the grade, not confirmation of their idea. Remind them of consent/ethics and that this feeds directly into the Product Definition Brief next week.</a:t>
             </a:r>
             <a:endParaRPr lang="en-US" dirty="0"/>
           </a:p>
@@ -1572,7 +1572,7 @@
           <a:p>
             <a:r>
               <a:rPr lang="en-US" dirty="0"/>
-              <a:t>Emphasize this is not bureaucratic — treating people well gets you better information, and you'll do this for years. Make the key point from the ethics reading: this is a classroom project, not 'research' in BYU's sense, so no IRB is needed — BUT ethics still fully apply, and if anyone later wants to publish or make generalizable claims, that DOES require IRB approval first, so talk to me. Flag the power-imbalance issue (don't lean on people who feel they can't say no). Read the consent script aloud and tell them to actually use something like it. Point them to resources/Interview-Ethics-for-Students.md.</a:t>
+              <a:t>Emphasize this is not bureaucratic — treating people well gets you better information, and you'll do this for years. Make the key point from the ethics reading: this is a classroom project, not 'research' in BYU's sense, so no IRB is needed — BUT ethics still fully apply, and if anyone later wants to publish or make generalizable claims, that DOES require IRB approval first, so talk to me. Flag the power-imbalance issue (don't lean on people who feel they can't say no). Read the consent script aloud and tell them to actually use something like it. Point them to Interview Ethics for Students, linked from today's session page on Canvas.</a:t>
             </a:r>
             <a:endParaRPr lang="en-US" dirty="0"/>
           </a:p>
@@ -4647,7 +4647,7 @@
                 <a:ea typeface="Calibri" pitchFamily="34" charset="-122"/>
                 <a:cs typeface="Calibri" pitchFamily="34" charset="-120"/>
               </a:rPr>
-              <a:t>Handout: assignments/Discovery-Notes.md · Feeds your Product Definition Brief (Week 3).</a:t>
+              <a:t>Handout: Discovery Notes (Canvas → Course Resources) · Feeds your Product Definition Brief (Week 3).</a:t>
             </a:r>
             <a:endParaRPr lang="en-US" sz="1400" dirty="0"/>
           </a:p>

--- a/canvas_material/lectures/powerpoint/Session04-Discovery.pptx
+++ b/canvas_material/lectures/powerpoint/Session04-Discovery.pptx
@@ -868,7 +868,7 @@
           <a:p>
             <a:r>
               <a:rPr lang="en-US" dirty="0"/>
-              <a:t>The trap to name: Ben reads better than Cara — it's tidy, specific, confident — and that's exactly why it's dangerous. Ask the room to spot the problems before you reveal the callout: none of it has a source, nothing is tagged as a guess, and the money line is a hypothetical stated as fact. Contrast directly with Cara: Cara is messier but honest — you know what she knows and what she doesn't. Bottom line for them: when they build their own persona for the assignment, it should look like Cara, not Ben. Better to admit low confidence than to invent certainty.</a:t>
+              <a:t>The trap to name: Ben reads better than Cara — it's tidy, specific, confident — and that's exactly why it's dangerous. Ask the room to spot the problems before you click to reveal the callout: none of it has a source, nothing is tagged as a guess, and the money line is a hypothetical stated as fact. Contrast directly with Cara: Cara is messier but honest — you know what she knows and what she doesn't. Bottom line for them: when they build their own persona for the assignment, it should look like Cara, not Ben. Better to admit low confidence than to invent certainty.</a:t>
             </a:r>
             <a:endParaRPr lang="en-US" dirty="0"/>
           </a:p>
@@ -4061,7 +4061,7 @@
       </p:sp>
       <p:sp>
         <p:nvSpPr>
-          <p:cNvPr id="7" name="Shape 5"/>
+          <p:cNvPr id="7" name="click-1"/>
           <p:cNvSpPr/>
           <p:nvPr/>
         </p:nvSpPr>
@@ -4090,7 +4090,7 @@
       </p:sp>
       <p:sp>
         <p:nvSpPr>
-          <p:cNvPr id="8" name="Shape 6"/>
+          <p:cNvPr id="8" name="click-1"/>
           <p:cNvSpPr/>
           <p:nvPr/>
         </p:nvSpPr>
@@ -4110,7 +4110,7 @@
       </p:sp>
       <p:pic>
         <p:nvPicPr>
-          <p:cNvPr id="9" name="Image 0" descr="preencoded.png">    </p:cNvPr>
+          <p:cNvPr id="9" name="click-1" descr="preencoded.png">    </p:cNvPr>
           <p:cNvPicPr>
             <a:picLocks noChangeAspect="1"/>
           </p:cNvPicPr>
@@ -4134,7 +4134,7 @@
       </p:pic>
       <p:sp>
         <p:nvSpPr>
-          <p:cNvPr id="10" name="Text 7"/>
+          <p:cNvPr id="10" name="click-1"/>
           <p:cNvSpPr/>
           <p:nvPr/>
         </p:nvSpPr>
@@ -4274,6 +4274,167 @@
   <p:clrMapOvr>
     <a:masterClrMapping/>
   </p:clrMapOvr>
+  <p:timing>
+    <p:tnLst>
+      <p:par>
+        <p:cTn id="1" dur="indefinite" restart="never" nodeType="tmRoot">
+          <p:childTnLst>
+            <p:seq concurrent="1" nextAc="seek">
+              <p:cTn id="2" dur="indefinite" nodeType="mainSeq">
+                <p:childTnLst>
+                  <p:par>
+                    <p:cTn id="3" fill="hold">
+                      <p:stCondLst>
+                        <p:cond delay="indefinite"/>
+                      </p:stCondLst>
+                      <p:childTnLst>
+                        <p:par>
+                          <p:cTn id="4" fill="hold">
+                            <p:stCondLst>
+                              <p:cond delay="0"/>
+                            </p:stCondLst>
+                            <p:childTnLst>
+                              <p:par>
+                                <p:cTn id="6" presetID="1" presetClass="entr" presetSubtype="0" fill="hold" grpId="0" nodeType="clickEffect">
+                                  <p:stCondLst>
+                                    <p:cond delay="0"/>
+                                  </p:stCondLst>
+                                  <p:childTnLst>
+                                    <p:set>
+                                      <p:cBhvr>
+                                        <p:cTn id="5" dur="1" fill="hold">
+                                          <p:stCondLst>
+                                            <p:cond delay="0"/>
+                                          </p:stCondLst>
+                                        </p:cTn>
+                                        <p:tgtEl>
+                                          <p:spTgt spid="7"/>
+                                        </p:tgtEl>
+                                        <p:attrNameLst>
+                                          <p:attrName>style.visibility</p:attrName>
+                                        </p:attrNameLst>
+                                      </p:cBhvr>
+                                      <p:to>
+                                        <p:strVal val="visible"/>
+                                      </p:to>
+                                    </p:set>
+                                  </p:childTnLst>
+                                </p:cTn>
+                              </p:par>
+                              <p:par>
+                                <p:cTn id="8" presetID="1" presetClass="entr" presetSubtype="0" fill="hold" grpId="0" nodeType="withEffect">
+                                  <p:stCondLst>
+                                    <p:cond delay="0"/>
+                                  </p:stCondLst>
+                                  <p:childTnLst>
+                                    <p:set>
+                                      <p:cBhvr>
+                                        <p:cTn id="7" dur="1" fill="hold">
+                                          <p:stCondLst>
+                                            <p:cond delay="0"/>
+                                          </p:stCondLst>
+                                        </p:cTn>
+                                        <p:tgtEl>
+                                          <p:spTgt spid="8"/>
+                                        </p:tgtEl>
+                                        <p:attrNameLst>
+                                          <p:attrName>style.visibility</p:attrName>
+                                        </p:attrNameLst>
+                                      </p:cBhvr>
+                                      <p:to>
+                                        <p:strVal val="visible"/>
+                                      </p:to>
+                                    </p:set>
+                                  </p:childTnLst>
+                                </p:cTn>
+                              </p:par>
+                              <p:par>
+                                <p:cTn id="10" presetID="1" presetClass="entr" presetSubtype="0" fill="hold" nodeType="withEffect">
+                                  <p:stCondLst>
+                                    <p:cond delay="0"/>
+                                  </p:stCondLst>
+                                  <p:childTnLst>
+                                    <p:set>
+                                      <p:cBhvr>
+                                        <p:cTn id="9" dur="1" fill="hold">
+                                          <p:stCondLst>
+                                            <p:cond delay="0"/>
+                                          </p:stCondLst>
+                                        </p:cTn>
+                                        <p:tgtEl>
+                                          <p:spTgt spid="9"/>
+                                        </p:tgtEl>
+                                        <p:attrNameLst>
+                                          <p:attrName>style.visibility</p:attrName>
+                                        </p:attrNameLst>
+                                      </p:cBhvr>
+                                      <p:to>
+                                        <p:strVal val="visible"/>
+                                      </p:to>
+                                    </p:set>
+                                  </p:childTnLst>
+                                </p:cTn>
+                              </p:par>
+                              <p:par>
+                                <p:cTn id="12" presetID="1" presetClass="entr" presetSubtype="0" fill="hold" grpId="0" nodeType="withEffect">
+                                  <p:stCondLst>
+                                    <p:cond delay="0"/>
+                                  </p:stCondLst>
+                                  <p:childTnLst>
+                                    <p:set>
+                                      <p:cBhvr>
+                                        <p:cTn id="11" dur="1" fill="hold">
+                                          <p:stCondLst>
+                                            <p:cond delay="0"/>
+                                          </p:stCondLst>
+                                        </p:cTn>
+                                        <p:tgtEl>
+                                          <p:spTgt spid="10"/>
+                                        </p:tgtEl>
+                                        <p:attrNameLst>
+                                          <p:attrName>style.visibility</p:attrName>
+                                        </p:attrNameLst>
+                                      </p:cBhvr>
+                                      <p:to>
+                                        <p:strVal val="visible"/>
+                                      </p:to>
+                                    </p:set>
+                                  </p:childTnLst>
+                                </p:cTn>
+                              </p:par>
+                            </p:childTnLst>
+                          </p:cTn>
+                        </p:par>
+                      </p:childTnLst>
+                    </p:cTn>
+                  </p:par>
+                </p:childTnLst>
+              </p:cTn>
+              <p:prevCondLst>
+                <p:cond evt="onPrev" delay="0">
+                  <p:tgtEl>
+                    <p:sldTgt/>
+                  </p:tgtEl>
+                </p:cond>
+              </p:prevCondLst>
+              <p:nextCondLst>
+                <p:cond evt="onNext" delay="0">
+                  <p:tgtEl>
+                    <p:sldTgt/>
+                  </p:tgtEl>
+                </p:cond>
+              </p:nextCondLst>
+            </p:seq>
+          </p:childTnLst>
+        </p:cTn>
+      </p:par>
+    </p:tnLst>
+    <p:bldLst>
+      <p:bldP spid="7" grpId="0" animBg="1"/>
+      <p:bldP spid="8" grpId="0" animBg="1"/>
+      <p:bldP spid="10" grpId="0" animBg="1"/>
+    </p:bldLst>
+  </p:timing>
 </p:sld>
 </file>
 
@@ -4908,7 +5069,7 @@
                 <a:ea typeface="Calibri" pitchFamily="34" charset="-122"/>
                 <a:cs typeface="Calibri" pitchFamily="34" charset="-120"/>
               </a:rPr>
-              <a:t>Turn in your License / OSS short response (from Session 3)</a:t>
+              <a:t>Turn in your License / OSS short response (from Session 3) and your Discovery Notes (from today)</a:t>
             </a:r>
             <a:endParaRPr lang="en-US" sz="1600" dirty="0"/>
           </a:p>
